--- a/classes/parte-6-analisis-de-malware/152-analisis-de-documentos-maliciosos-macros-y-pdf/clase-152-presentacion.pptx
+++ b/classes/parte-6-analisis-de-malware/152-analisis-de-documentos-maliciosos-macros-y-pdf/clase-152-presentacion.pptx
@@ -17,6 +17,9 @@
     <p:sldId id="265" r:id="rId16"/>
     <p:sldId id="266" r:id="rId17"/>
     <p:sldId id="267" r:id="rId18"/>
+    <p:sldId id="268" r:id="rId19"/>
+    <p:sldId id="269" r:id="rId20"/>
+    <p:sldId id="270" r:id="rId21"/>
   </p:sldIdLst>
   <p:sldSz cx="9144000" cy="6858000" type="screen4x3"/>
   <p:notesSz cx="6858000" cy="9144000"/>
@@ -3198,7 +3201,7 @@
                   <a:srgbClr val="0B3D2E"/>
                 </a:solidFill>
               </a:rPr>
-              <a:t>⚠️ Errores comunes</a:t>
+              <a:t>✍️ Ejercicios</a:t>
             </a:r>
           </a:p>
         </p:txBody>
@@ -3236,67 +3239,82 @@
                   <a:srgbClr val="22282E"/>
                 </a:solidFill>
               </a:rPr>
-              <a:t>•  Abrir el doc en Word para "verlo" — Detona la macro; usa solo oletools</a:t>
-            </a:r>
-          </a:p>
-          <a:p>
-            <a:pPr>
-              <a:spcAft>
-                <a:spcPts val="600"/>
-              </a:spcAft>
-            </a:pPr>
-            <a:r>
-              <a:rPr sz="1500">
-                <a:solidFill>
-                  <a:srgbClr val="22282E"/>
-                </a:solidFill>
-              </a:rPr>
-              <a:t>•  olevba sin resultados — Macro en objeto embebido; revisa oledump.py por stream</a:t>
-            </a:r>
-          </a:p>
-          <a:p>
-            <a:pPr>
-              <a:spcAft>
-                <a:spcPts val="600"/>
-              </a:spcAft>
-            </a:pPr>
-            <a:r>
-              <a:rPr sz="1500">
-                <a:solidFill>
-                  <a:srgbClr val="22282E"/>
-                </a:solidFill>
-              </a:rPr>
-              <a:t>•  PowerShell ilegible — Está en base64 UTF-16LE; decodifica con CyberChef</a:t>
-            </a:r>
-          </a:p>
-          <a:p>
-            <a:pPr>
-              <a:spcAft>
-                <a:spcPts val="600"/>
-              </a:spcAft>
-            </a:pPr>
-            <a:r>
-              <a:rPr sz="1500">
-                <a:solidFill>
-                  <a:srgbClr val="22282E"/>
-                </a:solidFill>
-              </a:rPr>
-              <a:t>•  PDF "sin JS" pero sospechoso — Revisa /Launch, /EmbeddedFile y URIs, no solo /JS</a:t>
-            </a:r>
-          </a:p>
-          <a:p>
-            <a:pPr>
-              <a:spcAft>
-                <a:spcPts val="600"/>
-              </a:spcAft>
-            </a:pPr>
-            <a:r>
-              <a:rPr sz="1500">
-                <a:solidFill>
-                  <a:srgbClr val="22282E"/>
-                </a:solidFill>
-              </a:rPr>
-              <a:t>•  Perder la segunda etapa — La URL responde en INetSim; captura el payload en el lab</a:t>
+              <a:t>•  Explica la diferencia de análisis entre .doc (OLE) y .docx/.xlsm (OOXML).</a:t>
+            </a:r>
+          </a:p>
+          <a:p>
+            <a:pPr>
+              <a:spcAft>
+                <a:spcPts val="600"/>
+              </a:spcAft>
+            </a:pPr>
+            <a:r>
+              <a:rPr sz="1500">
+                <a:solidFill>
+                  <a:srgbClr val="22282E"/>
+                </a:solidFill>
+              </a:rPr>
+              <a:t>•  Desofusca una macro que usa Chr() + concatenación.</a:t>
+            </a:r>
+          </a:p>
+          <a:p>
+            <a:pPr>
+              <a:spcAft>
+                <a:spcPts val="600"/>
+              </a:spcAft>
+            </a:pPr>
+            <a:r>
+              <a:rPr sz="1500">
+                <a:solidFill>
+                  <a:srgbClr val="22282E"/>
+                </a:solidFill>
+              </a:rPr>
+              <a:t>•  Decodifica un powershell -enc y extrae la URL.</a:t>
+            </a:r>
+          </a:p>
+          <a:p>
+            <a:pPr>
+              <a:spcAft>
+                <a:spcPts val="600"/>
+              </a:spcAft>
+            </a:pPr>
+            <a:r>
+              <a:rPr sz="1500">
+                <a:solidFill>
+                  <a:srgbClr val="22282E"/>
+                </a:solidFill>
+              </a:rPr>
+              <a:t>•  Interpreta la salida de pdfid.py y prioriza qué objeto revisar.</a:t>
+            </a:r>
+          </a:p>
+          <a:p>
+            <a:pPr>
+              <a:spcAft>
+                <a:spcPts val="600"/>
+              </a:spcAft>
+            </a:pPr>
+            <a:r>
+              <a:rPr sz="1500">
+                <a:solidFill>
+                  <a:srgbClr val="22282E"/>
+                </a:solidFill>
+              </a:rPr>
+              <a:t>•  Extrae y explica un /OpenAction con /Launch.</a:t>
+            </a:r>
+          </a:p>
+          <a:p>
+            <a:pPr>
+              <a:spcAft>
+                <a:spcPts val="600"/>
+              </a:spcAft>
+            </a:pPr>
+            <a:r>
+              <a:rPr sz="1500">
+                <a:solidFill>
+                  <a:srgbClr val="22282E"/>
+                </a:solidFill>
+              </a:rPr>
+              <a:t>•  Redacta 5 IOCs a partir de un documento analizado.</a:t>
             </a:r>
           </a:p>
         </p:txBody>
@@ -3347,7 +3365,7 @@
                   <a:srgbClr val="0B3D2E"/>
                 </a:solidFill>
               </a:rPr>
-              <a:t>❓ Preguntas frecuentes</a:t>
+              <a:t>📝 Reto verificable</a:t>
             </a:r>
           </a:p>
         </p:txBody>
@@ -3385,37 +3403,22 @@
                   <a:srgbClr val="22282E"/>
                 </a:solidFill>
               </a:rPr>
-              <a:t>•  ❓ ¿Por qué no abrir el documento? Porque la macro o el exploit se ejecutan al abrir. Las herramientas de línea de comandos extraen el contenido sin detonarlo.</a:t>
-            </a:r>
-          </a:p>
-          <a:p>
-            <a:pPr>
-              <a:spcAft>
-                <a:spcPts val="600"/>
-              </a:spcAft>
-            </a:pPr>
-            <a:r>
-              <a:rPr sz="1500">
-                <a:solidFill>
-                  <a:srgbClr val="22282E"/>
-                </a:solidFill>
-              </a:rPr>
-              <a:t>•  ❓ ¿Siguen usándose macros? Menos desde que Office bloquea macros de Internet por defecto, pero persisten junto a otros vectores (HTML smuggling, LNK, contenedores).</a:t>
-            </a:r>
-          </a:p>
-          <a:p>
-            <a:pPr>
-              <a:spcAft>
-                <a:spcPts val="600"/>
-              </a:spcAft>
-            </a:pPr>
-            <a:r>
-              <a:rPr sz="1500">
-                <a:solidFill>
-                  <a:srgbClr val="22282E"/>
-                </a:solidFill>
-              </a:rPr>
-              <a:t>•  ❓ ¿Cómo decodifico un PowerShell ofuscado? Empieza por -EncodedCommand (base64 UTF-16LE) y luego deshaz capas (gzip, replace, format) con CyberChef.</a:t>
+              <a:t>•  Analiza un documento malicioso (Office o PDF) y entrega la cadena de ejecución reconstruida desde la apertura hasta el payload de segunda etapa, con la macro/JS desofuscado y los IOCs.</a:t>
+            </a:r>
+          </a:p>
+          <a:p>
+            <a:pPr>
+              <a:spcAft>
+                <a:spcPts val="600"/>
+              </a:spcAft>
+            </a:pPr>
+            <a:r>
+              <a:rPr sz="1500">
+                <a:solidFill>
+                  <a:srgbClr val="22282E"/>
+                </a:solidFill>
+              </a:rPr>
+              <a:t>•  Criterio de aceptación: presentas el comando final desofuscado (p. ej. el PowerShell decodificado) y al menos una URL/IOC de la segunda etapa, sin haber abierto nunca el documento en su aplicación.</a:t>
             </a:r>
           </a:p>
         </p:txBody>
@@ -3466,7 +3469,7 @@
                   <a:srgbClr val="0B3D2E"/>
                 </a:solidFill>
               </a:rPr>
-              <a:t>🔗 Referencias</a:t>
+              <a:t>⚠️ Errores comunes</a:t>
             </a:r>
           </a:p>
         </p:txBody>
@@ -3504,6 +3507,274 @@
                   <a:srgbClr val="22282E"/>
                 </a:solidFill>
               </a:rPr>
+              <a:t>•  Abrir el doc en Word para "verlo" — Detona la macro; usa solo oletools</a:t>
+            </a:r>
+          </a:p>
+          <a:p>
+            <a:pPr>
+              <a:spcAft>
+                <a:spcPts val="600"/>
+              </a:spcAft>
+            </a:pPr>
+            <a:r>
+              <a:rPr sz="1500">
+                <a:solidFill>
+                  <a:srgbClr val="22282E"/>
+                </a:solidFill>
+              </a:rPr>
+              <a:t>•  olevba sin resultados — Macro en objeto embebido; revisa oledump.py por stream</a:t>
+            </a:r>
+          </a:p>
+          <a:p>
+            <a:pPr>
+              <a:spcAft>
+                <a:spcPts val="600"/>
+              </a:spcAft>
+            </a:pPr>
+            <a:r>
+              <a:rPr sz="1500">
+                <a:solidFill>
+                  <a:srgbClr val="22282E"/>
+                </a:solidFill>
+              </a:rPr>
+              <a:t>•  PowerShell ilegible — Está en base64 UTF-16LE; decodifica con CyberChef</a:t>
+            </a:r>
+          </a:p>
+          <a:p>
+            <a:pPr>
+              <a:spcAft>
+                <a:spcPts val="600"/>
+              </a:spcAft>
+            </a:pPr>
+            <a:r>
+              <a:rPr sz="1500">
+                <a:solidFill>
+                  <a:srgbClr val="22282E"/>
+                </a:solidFill>
+              </a:rPr>
+              <a:t>•  PDF "sin JS" pero sospechoso — Revisa /Launch, /EmbeddedFile y URIs, no solo /JS</a:t>
+            </a:r>
+          </a:p>
+          <a:p>
+            <a:pPr>
+              <a:spcAft>
+                <a:spcPts val="600"/>
+              </a:spcAft>
+            </a:pPr>
+            <a:r>
+              <a:rPr sz="1500">
+                <a:solidFill>
+                  <a:srgbClr val="22282E"/>
+                </a:solidFill>
+              </a:rPr>
+              <a:t>•  Perder la segunda etapa — La URL responde en INetSim; captura el payload en el lab</a:t>
+            </a:r>
+          </a:p>
+        </p:txBody>
+      </p:sp>
+    </p:spTree>
+  </p:cSld>
+  <p:clrMapOvr>
+    <a:masterClrMapping/>
+  </p:clrMapOvr>
+</p:sld>
+</file>
+
+<file path=ppt/slides/slide13.xml><?xml version="1.0" encoding="utf-8"?>
+<p:sld xmlns:a="http://schemas.openxmlformats.org/drawingml/2006/main" xmlns:p="http://schemas.openxmlformats.org/presentationml/2006/main" xmlns:r="http://schemas.openxmlformats.org/officeDocument/2006/relationships">
+  <p:cSld>
+    <p:spTree>
+      <p:nvGrpSpPr>
+        <p:cNvPr id="1" name=""/>
+        <p:cNvGrpSpPr/>
+        <p:nvPr/>
+      </p:nvGrpSpPr>
+      <p:grpSpPr/>
+      <p:sp>
+        <p:nvSpPr>
+          <p:cNvPr id="2" name="TextBox 1"/>
+          <p:cNvSpPr txBox="1"/>
+          <p:nvPr/>
+        </p:nvSpPr>
+        <p:spPr>
+          <a:xfrm>
+            <a:off x="457200" y="320040"/>
+            <a:ext cx="8229600" cy="822960"/>
+          </a:xfrm>
+          <a:prstGeom prst="rect">
+            <a:avLst/>
+          </a:prstGeom>
+          <a:noFill/>
+        </p:spPr>
+        <p:txBody>
+          <a:bodyPr wrap="square">
+            <a:spAutoFit/>
+          </a:bodyPr>
+          <a:lstStyle/>
+          <a:p>
+            <a:r>
+              <a:rPr sz="2600" b="1">
+                <a:solidFill>
+                  <a:srgbClr val="0B3D2E"/>
+                </a:solidFill>
+              </a:rPr>
+              <a:t>❓ Preguntas frecuentes</a:t>
+            </a:r>
+          </a:p>
+        </p:txBody>
+      </p:sp>
+      <p:sp>
+        <p:nvSpPr>
+          <p:cNvPr id="3" name="TextBox 2"/>
+          <p:cNvSpPr txBox="1"/>
+          <p:nvPr/>
+        </p:nvSpPr>
+        <p:spPr>
+          <a:xfrm>
+            <a:off x="457200" y="1280160"/>
+            <a:ext cx="8229600" cy="4937760"/>
+          </a:xfrm>
+          <a:prstGeom prst="rect">
+            <a:avLst/>
+          </a:prstGeom>
+          <a:noFill/>
+        </p:spPr>
+        <p:txBody>
+          <a:bodyPr wrap="square">
+            <a:spAutoFit/>
+          </a:bodyPr>
+          <a:lstStyle/>
+          <a:p>
+            <a:pPr>
+              <a:spcAft>
+                <a:spcPts val="600"/>
+              </a:spcAft>
+            </a:pPr>
+            <a:r>
+              <a:rPr sz="1500">
+                <a:solidFill>
+                  <a:srgbClr val="22282E"/>
+                </a:solidFill>
+              </a:rPr>
+              <a:t>•  ❓ ¿Por qué no abrir el documento? Porque la macro o el exploit se ejecutan al abrir. Las herramientas de línea de comandos extraen el contenido sin detonarlo.</a:t>
+            </a:r>
+          </a:p>
+          <a:p>
+            <a:pPr>
+              <a:spcAft>
+                <a:spcPts val="600"/>
+              </a:spcAft>
+            </a:pPr>
+            <a:r>
+              <a:rPr sz="1500">
+                <a:solidFill>
+                  <a:srgbClr val="22282E"/>
+                </a:solidFill>
+              </a:rPr>
+              <a:t>•  ❓ ¿Siguen usándose macros? Menos desde que Office bloquea macros de Internet por defecto, pero persisten junto a otros vectores (HTML smuggling, LNK, contenedores).</a:t>
+            </a:r>
+          </a:p>
+          <a:p>
+            <a:pPr>
+              <a:spcAft>
+                <a:spcPts val="600"/>
+              </a:spcAft>
+            </a:pPr>
+            <a:r>
+              <a:rPr sz="1500">
+                <a:solidFill>
+                  <a:srgbClr val="22282E"/>
+                </a:solidFill>
+              </a:rPr>
+              <a:t>•  ❓ ¿Cómo decodifico un PowerShell ofuscado? Empieza por -EncodedCommand (base64 UTF-16LE) y luego deshaz capas (gzip, replace, format) con CyberChef.</a:t>
+            </a:r>
+          </a:p>
+        </p:txBody>
+      </p:sp>
+    </p:spTree>
+  </p:cSld>
+  <p:clrMapOvr>
+    <a:masterClrMapping/>
+  </p:clrMapOvr>
+</p:sld>
+</file>
+
+<file path=ppt/slides/slide14.xml><?xml version="1.0" encoding="utf-8"?>
+<p:sld xmlns:a="http://schemas.openxmlformats.org/drawingml/2006/main" xmlns:p="http://schemas.openxmlformats.org/presentationml/2006/main" xmlns:r="http://schemas.openxmlformats.org/officeDocument/2006/relationships">
+  <p:cSld>
+    <p:spTree>
+      <p:nvGrpSpPr>
+        <p:cNvPr id="1" name=""/>
+        <p:cNvGrpSpPr/>
+        <p:nvPr/>
+      </p:nvGrpSpPr>
+      <p:grpSpPr/>
+      <p:sp>
+        <p:nvSpPr>
+          <p:cNvPr id="2" name="TextBox 1"/>
+          <p:cNvSpPr txBox="1"/>
+          <p:nvPr/>
+        </p:nvSpPr>
+        <p:spPr>
+          <a:xfrm>
+            <a:off x="457200" y="320040"/>
+            <a:ext cx="8229600" cy="822960"/>
+          </a:xfrm>
+          <a:prstGeom prst="rect">
+            <a:avLst/>
+          </a:prstGeom>
+          <a:noFill/>
+        </p:spPr>
+        <p:txBody>
+          <a:bodyPr wrap="square">
+            <a:spAutoFit/>
+          </a:bodyPr>
+          <a:lstStyle/>
+          <a:p>
+            <a:r>
+              <a:rPr sz="2600" b="1">
+                <a:solidFill>
+                  <a:srgbClr val="0B3D2E"/>
+                </a:solidFill>
+              </a:rPr>
+              <a:t>🔗 Referencias</a:t>
+            </a:r>
+          </a:p>
+        </p:txBody>
+      </p:sp>
+      <p:sp>
+        <p:nvSpPr>
+          <p:cNvPr id="3" name="TextBox 2"/>
+          <p:cNvSpPr txBox="1"/>
+          <p:nvPr/>
+        </p:nvSpPr>
+        <p:spPr>
+          <a:xfrm>
+            <a:off x="457200" y="1280160"/>
+            <a:ext cx="8229600" cy="4937760"/>
+          </a:xfrm>
+          <a:prstGeom prst="rect">
+            <a:avLst/>
+          </a:prstGeom>
+          <a:noFill/>
+        </p:spPr>
+        <p:txBody>
+          <a:bodyPr wrap="square">
+            <a:spAutoFit/>
+          </a:bodyPr>
+          <a:lstStyle/>
+          <a:p>
+            <a:pPr>
+              <a:spcAft>
+                <a:spcPts val="600"/>
+              </a:spcAft>
+            </a:pPr>
+            <a:r>
+              <a:rPr sz="1500">
+                <a:solidFill>
+                  <a:srgbClr val="22282E"/>
+                </a:solidFill>
+              </a:rPr>
               <a:t>•  Monnappa K. A., Learning Malware Analysis, cap. sobre documentos.</a:t>
             </a:r>
           </a:p>
@@ -3554,6 +3825,81 @@
           </a:p>
         </p:txBody>
       </p:sp>
+    </p:spTree>
+  </p:cSld>
+  <p:clrMapOvr>
+    <a:masterClrMapping/>
+  </p:clrMapOvr>
+</p:sld>
+</file>
+
+<file path=ppt/slides/slide15.xml><?xml version="1.0" encoding="utf-8"?>
+<p:sld xmlns:a="http://schemas.openxmlformats.org/drawingml/2006/main" xmlns:p="http://schemas.openxmlformats.org/presentationml/2006/main" xmlns:r="http://schemas.openxmlformats.org/officeDocument/2006/relationships">
+  <p:cSld>
+    <p:spTree>
+      <p:nvGrpSpPr>
+        <p:cNvPr id="1" name=""/>
+        <p:cNvGrpSpPr/>
+        <p:nvPr/>
+      </p:nvGrpSpPr>
+      <p:grpSpPr/>
+      <p:sp>
+        <p:nvSpPr>
+          <p:cNvPr id="2" name="TextBox 1"/>
+          <p:cNvSpPr txBox="1"/>
+          <p:nvPr/>
+        </p:nvSpPr>
+        <p:spPr>
+          <a:xfrm>
+            <a:off x="457200" y="274320"/>
+            <a:ext cx="8229600" cy="640080"/>
+          </a:xfrm>
+          <a:prstGeom prst="rect">
+            <a:avLst/>
+          </a:prstGeom>
+          <a:noFill/>
+        </p:spPr>
+        <p:txBody>
+          <a:bodyPr wrap="square">
+            <a:spAutoFit/>
+          </a:bodyPr>
+          <a:lstStyle/>
+          <a:p>
+            <a:r>
+              <a:rPr sz="2200" b="1">
+                <a:solidFill>
+                  <a:srgbClr val="0B3D2E"/>
+                </a:solidFill>
+              </a:rPr>
+              <a:t>Diagrama de la clase</a:t>
+            </a:r>
+          </a:p>
+        </p:txBody>
+      </p:sp>
+      <p:pic>
+        <p:nvPicPr>
+          <p:cNvPr id="3" name="Picture 2" descr="ba35460366e052df.png"/>
+          <p:cNvPicPr>
+            <a:picLocks noChangeAspect="1"/>
+          </p:cNvPicPr>
+          <p:nvPr/>
+        </p:nvPicPr>
+        <p:blipFill>
+          <a:blip r:embed="rId2"/>
+          <a:stretch>
+            <a:fillRect/>
+          </a:stretch>
+        </p:blipFill>
+        <p:spPr>
+          <a:xfrm>
+            <a:off x="2893040" y="1097280"/>
+            <a:ext cx="3357919" cy="5303520"/>
+          </a:xfrm>
+          <a:prstGeom prst="rect">
+            <a:avLst/>
+          </a:prstGeom>
+        </p:spPr>
+      </p:pic>
     </p:spTree>
   </p:cSld>
   <p:clrMapOvr>
@@ -3638,7 +3984,7 @@
                   <a:srgbClr val="22282E"/>
                 </a:solidFill>
               </a:rPr>
-              <a:t>•  Analizar el vector de entrega más común en phishing: documentos ofimáticos con macros VBA y PDFs maliciosos. El alumno aprenderá a extraer y desofuscar macros, seguir la cadena de descarga/ejecución, examinar la estructura interna de un PDF y encontrar el JavaScript o los objetos que detonan la infección, todo sin abrir el documento en su aplicación real.</a:t>
+              <a:t>•  Analizar el vector de entrega más común en phishing: documentos ofimáticos con macros VBA y PDFs maliciosos. El alumno aprenderá a extraer y desofuscar macros, seguir la cadena de descarga/ejecución…</a:t>
             </a:r>
           </a:p>
         </p:txBody>
@@ -4032,7 +4378,7 @@
                   <a:srgbClr val="0B3D2E"/>
                 </a:solidFill>
               </a:rPr>
-              <a:t>📖 Definiciones y características</a:t>
+              <a:t>🧠 Explicación en profundidad</a:t>
             </a:r>
           </a:p>
         </p:txBody>
@@ -4070,67 +4416,97 @@
                   <a:srgbClr val="22282E"/>
                 </a:solidFill>
               </a:rPr>
-              <a:t>•  Macro VBA: código embebido en Office. Característica clave: autoejecución con AutoOpen.</a:t>
-            </a:r>
-          </a:p>
-          <a:p>
-            <a:pPr>
-              <a:spcAft>
-                <a:spcPts val="600"/>
-              </a:spcAft>
-            </a:pPr>
-            <a:r>
-              <a:rPr sz="1500">
-                <a:solidFill>
-                  <a:srgbClr val="22282E"/>
-                </a:solidFill>
-              </a:rPr>
-              <a:t>•  OLE (Compound File): contenedor binario de Office clásico (.doc/.xls). Característica clave: streams internos.</a:t>
-            </a:r>
-          </a:p>
-          <a:p>
-            <a:pPr>
-              <a:spcAft>
-                <a:spcPts val="600"/>
-              </a:spcAft>
-            </a:pPr>
-            <a:r>
-              <a:rPr sz="1500">
-                <a:solidFill>
-                  <a:srgbClr val="22282E"/>
-                </a:solidFill>
-              </a:rPr>
-              <a:t>•  OOXML: formato ZIP+XML moderno (.docx/.xlsm). Característica clave: descomprimible.</a:t>
-            </a:r>
-          </a:p>
-          <a:p>
-            <a:pPr>
-              <a:spcAft>
-                <a:spcPts val="600"/>
-              </a:spcAft>
-            </a:pPr>
-            <a:r>
-              <a:rPr sz="1500">
-                <a:solidFill>
-                  <a:srgbClr val="22282E"/>
-                </a:solidFill>
-              </a:rPr>
-              <a:t>•  /OpenAction: acción que un PDF ejecuta al abrirse. Característica clave: detonación automática.</a:t>
-            </a:r>
-          </a:p>
-          <a:p>
-            <a:pPr>
-              <a:spcAft>
-                <a:spcPts val="600"/>
-              </a:spcAft>
-            </a:pPr>
-            <a:r>
-              <a:rPr sz="1500">
-                <a:solidFill>
-                  <a:srgbClr val="22282E"/>
-                </a:solidFill>
-              </a:rPr>
-              <a:t>•  LOLBin: binario legítimo abusado (mshta, powershell). Característica clave: evasión por confianza.</a:t>
+              <a:t>•  Los documentos maliciosos (maldocs) son uno de los vectores de acceso inicial más comunes, porque</a:t>
+            </a:r>
+          </a:p>
+          <a:p>
+            <a:pPr>
+              <a:spcAft>
+                <a:spcPts val="600"/>
+              </a:spcAft>
+            </a:pPr>
+            <a:r>
+              <a:rPr sz="1500">
+                <a:solidFill>
+                  <a:srgbClr val="22282E"/>
+                </a:solidFill>
+              </a:rPr>
+              <a:t>•  explotan la confianza: un Word, un Excel o un PDF parecen datos inertes, no programas, y por eso la gente</a:t>
+            </a:r>
+          </a:p>
+          <a:p>
+            <a:pPr>
+              <a:spcAft>
+                <a:spcPts val="600"/>
+              </a:spcAft>
+            </a:pPr>
+            <a:r>
+              <a:rPr sz="1500">
+                <a:solidFill>
+                  <a:srgbClr val="22282E"/>
+                </a:solidFill>
+              </a:rPr>
+              <a:t>•  los abre sin recelo. Pero estos formatos pueden contener y ejecutar código —macros, JavaScript,</a:t>
+            </a:r>
+          </a:p>
+          <a:p>
+            <a:pPr>
+              <a:spcAft>
+                <a:spcPts val="600"/>
+              </a:spcAft>
+            </a:pPr>
+            <a:r>
+              <a:rPr sz="1500">
+                <a:solidFill>
+                  <a:srgbClr val="22282E"/>
+                </a:solidFill>
+              </a:rPr>
+              <a:t>•  acciones automáticas—, y un maldoc bien hecho convierte "abrir un adjunto" en "ejecutar malware". El</a:t>
+            </a:r>
+          </a:p>
+          <a:p>
+            <a:pPr>
+              <a:spcAft>
+                <a:spcPts val="600"/>
+              </a:spcAft>
+            </a:pPr>
+            <a:r>
+              <a:rPr sz="1500">
+                <a:solidFill>
+                  <a:srgbClr val="22282E"/>
+                </a:solidFill>
+              </a:rPr>
+              <a:t>•  análisis de maldocs tiene su propio instrumental porque no se analiza un ejecutable, sino un formato de</a:t>
+            </a:r>
+          </a:p>
+          <a:p>
+            <a:pPr>
+              <a:spcAft>
+                <a:spcPts val="600"/>
+              </a:spcAft>
+            </a:pPr>
+            <a:r>
+              <a:rPr sz="1500">
+                <a:solidFill>
+                  <a:srgbClr val="22282E"/>
+                </a:solidFill>
+              </a:rPr>
+              <a:t>•  documento del que hay que extraer el código embebido para estudiarlo. Casi siempre el documento no</a:t>
+            </a:r>
+          </a:p>
+          <a:p>
+            <a:pPr>
+              <a:spcAft>
+                <a:spcPts val="600"/>
+              </a:spcAft>
+            </a:pPr>
+            <a:r>
+              <a:rPr sz="1500">
+                <a:solidFill>
+                  <a:srgbClr val="22282E"/>
+                </a:solidFill>
+              </a:rPr>
+              <a:t>•  es el malware final: es un cargador (la primera etapa de la cadena de entrega) que descarga o</a:t>
             </a:r>
           </a:p>
         </p:txBody>
@@ -4181,7 +4557,7 @@
                   <a:srgbClr val="0B3D2E"/>
                 </a:solidFill>
               </a:rPr>
-              <a:t>🧰 Herramientas y preparación</a:t>
+              <a:t>📖 Definiciones y características</a:t>
             </a:r>
           </a:p>
         </p:txBody>
@@ -4219,52 +4595,67 @@
                   <a:srgbClr val="22282E"/>
                 </a:solidFill>
               </a:rPr>
-              <a:t>•  oletools (olevba, oleid, oledump.py) para Office.</a:t>
-            </a:r>
-          </a:p>
-          <a:p>
-            <a:pPr>
-              <a:spcAft>
-                <a:spcPts val="600"/>
-              </a:spcAft>
-            </a:pPr>
-            <a:r>
-              <a:rPr sz="1500">
-                <a:solidFill>
-                  <a:srgbClr val="22282E"/>
-                </a:solidFill>
-              </a:rPr>
-              <a:t>•  peepdf, pdf-parser.py, pdfid.py (Didier Stevens) para PDF.</a:t>
-            </a:r>
-          </a:p>
-          <a:p>
-            <a:pPr>
-              <a:spcAft>
-                <a:spcPts val="600"/>
-              </a:spcAft>
-            </a:pPr>
-            <a:r>
-              <a:rPr sz="1500">
-                <a:solidFill>
-                  <a:srgbClr val="22282E"/>
-                </a:solidFill>
-              </a:rPr>
-              <a:t>•  CyberChef para desofuscar cadenas.</a:t>
-            </a:r>
-          </a:p>
-          <a:p>
-            <a:pPr>
-              <a:spcAft>
-                <a:spcPts val="600"/>
-              </a:spcAft>
-            </a:pPr>
-            <a:r>
-              <a:rPr sz="1500">
-                <a:solidFill>
-                  <a:srgbClr val="22282E"/>
-                </a:solidFill>
-              </a:rPr>
-              <a:t>•  REMnux trae la mayoría preinstaladas.</a:t>
+              <a:t>•  Macro VBA: código embebido en Office. Característica clave: autoejecución con AutoOpen.</a:t>
+            </a:r>
+          </a:p>
+          <a:p>
+            <a:pPr>
+              <a:spcAft>
+                <a:spcPts val="600"/>
+              </a:spcAft>
+            </a:pPr>
+            <a:r>
+              <a:rPr sz="1500">
+                <a:solidFill>
+                  <a:srgbClr val="22282E"/>
+                </a:solidFill>
+              </a:rPr>
+              <a:t>•  OLE (Compound File): contenedor binario de Office clásico (.doc/.xls). Característica clave: streams internos.</a:t>
+            </a:r>
+          </a:p>
+          <a:p>
+            <a:pPr>
+              <a:spcAft>
+                <a:spcPts val="600"/>
+              </a:spcAft>
+            </a:pPr>
+            <a:r>
+              <a:rPr sz="1500">
+                <a:solidFill>
+                  <a:srgbClr val="22282E"/>
+                </a:solidFill>
+              </a:rPr>
+              <a:t>•  OOXML: formato ZIP+XML moderno (.docx/.xlsm). Característica clave: descomprimible.</a:t>
+            </a:r>
+          </a:p>
+          <a:p>
+            <a:pPr>
+              <a:spcAft>
+                <a:spcPts val="600"/>
+              </a:spcAft>
+            </a:pPr>
+            <a:r>
+              <a:rPr sz="1500">
+                <a:solidFill>
+                  <a:srgbClr val="22282E"/>
+                </a:solidFill>
+              </a:rPr>
+              <a:t>•  /OpenAction: acción que un PDF ejecuta al abrirse. Característica clave: detonación automática.</a:t>
+            </a:r>
+          </a:p>
+          <a:p>
+            <a:pPr>
+              <a:spcAft>
+                <a:spcPts val="600"/>
+              </a:spcAft>
+            </a:pPr>
+            <a:r>
+              <a:rPr sz="1500">
+                <a:solidFill>
+                  <a:srgbClr val="22282E"/>
+                </a:solidFill>
+              </a:rPr>
+              <a:t>•  LOLBin: binario legítimo abusado (mshta, powershell). Característica clave: evasión por confianza.</a:t>
             </a:r>
           </a:p>
         </p:txBody>
@@ -4315,7 +4706,7 @@
                   <a:srgbClr val="0B3D2E"/>
                 </a:solidFill>
               </a:rPr>
-              <a:t>🧪 Laboratorio guiado</a:t>
+              <a:t>📔 Glosario</a:t>
             </a:r>
           </a:p>
         </p:txBody>
@@ -4353,97 +4744,97 @@
                   <a:srgbClr val="22282E"/>
                 </a:solidFill>
               </a:rPr>
-              <a:t>•  Documento Office con macros:</a:t>
-            </a:r>
-          </a:p>
-          <a:p>
-            <a:pPr>
-              <a:spcAft>
-                <a:spcPts val="600"/>
-              </a:spcAft>
-            </a:pPr>
-            <a:r>
-              <a:rPr sz="1500">
-                <a:solidFill>
-                  <a:srgbClr val="22282E"/>
-                </a:solidFill>
-              </a:rPr>
-              <a:t>•  Identifica el tipo: oleid documento.doc. ¿Tiene macros?, ¿VBA?, ¿objetos embebidos?</a:t>
-            </a:r>
-          </a:p>
-          <a:p>
-            <a:pPr>
-              <a:spcAft>
-                <a:spcPts val="600"/>
-              </a:spcAft>
-            </a:pPr>
-            <a:r>
-              <a:rPr sz="1500">
-                <a:solidFill>
-                  <a:srgbClr val="22282E"/>
-                </a:solidFill>
-              </a:rPr>
-              <a:t>•  Extrae y analiza la macro: olevba documento.doc. Localiza AutoOpen/DocumentOpen y marca las cadenas ofuscadas.</a:t>
-            </a:r>
-          </a:p>
-          <a:p>
-            <a:pPr>
-              <a:spcAft>
-                <a:spcPts val="600"/>
-              </a:spcAft>
-            </a:pPr>
-            <a:r>
-              <a:rPr sz="1500">
-                <a:solidFill>
-                  <a:srgbClr val="22282E"/>
-                </a:solidFill>
-              </a:rPr>
-              <a:t>•  Desofusca: reconstruye concatenaciones, Chr(), base64 y XOR con CyberChef hasta obtener el comando real (típicamente un powershell -enc ...).</a:t>
-            </a:r>
-          </a:p>
-          <a:p>
-            <a:pPr>
-              <a:spcAft>
-                <a:spcPts val="600"/>
-              </a:spcAft>
-            </a:pPr>
-            <a:r>
-              <a:rPr sz="1500">
-                <a:solidFill>
-                  <a:srgbClr val="22282E"/>
-                </a:solidFill>
-              </a:rPr>
-              <a:t>•  Decodifica el PowerShell (-EncodedCommand es base64 UTF-16LE) y extrae la URL de descarga y el payload de segunda etapa.</a:t>
-            </a:r>
-          </a:p>
-          <a:p>
-            <a:pPr>
-              <a:spcAft>
-                <a:spcPts val="600"/>
-              </a:spcAft>
-            </a:pPr>
-            <a:r>
-              <a:rPr sz="1500">
-                <a:solidFill>
-                  <a:srgbClr val="22282E"/>
-                </a:solidFill>
-              </a:rPr>
-              <a:t>•  PDF malicioso:</a:t>
-            </a:r>
-          </a:p>
-          <a:p>
-            <a:pPr>
-              <a:spcAft>
-                <a:spcPts val="600"/>
-              </a:spcAft>
-            </a:pPr>
-            <a:r>
-              <a:rPr sz="1500">
-                <a:solidFill>
-                  <a:srgbClr val="22282E"/>
-                </a:solidFill>
-              </a:rPr>
-              <a:t>•  Triaje: pdfid.py doc.pdf para contar /JS, /OpenAction, /Launch, /EmbeddedFile.</a:t>
+              <a:t>•  Término — Definición concisa</a:t>
+            </a:r>
+          </a:p>
+          <a:p>
+            <a:pPr>
+              <a:spcAft>
+                <a:spcPts val="600"/>
+              </a:spcAft>
+            </a:pPr>
+            <a:r>
+              <a:rPr sz="1500">
+                <a:solidFill>
+                  <a:srgbClr val="22282E"/>
+                </a:solidFill>
+              </a:rPr>
+              <a:t>•  Documento malicioso (maldoc) — Documento que contiene y ejecuta código</a:t>
+            </a:r>
+          </a:p>
+          <a:p>
+            <a:pPr>
+              <a:spcAft>
+                <a:spcPts val="600"/>
+              </a:spcAft>
+            </a:pPr>
+            <a:r>
+              <a:rPr sz="1500">
+                <a:solidFill>
+                  <a:srgbClr val="22282E"/>
+                </a:solidFill>
+              </a:rPr>
+              <a:t>•  Cargador — Primera etapa que descarga o despliega la carga real</a:t>
+            </a:r>
+          </a:p>
+          <a:p>
+            <a:pPr>
+              <a:spcAft>
+                <a:spcPts val="600"/>
+              </a:spcAft>
+            </a:pPr>
+            <a:r>
+              <a:rPr sz="1500">
+                <a:solidFill>
+                  <a:srgbClr val="22282E"/>
+                </a:solidFill>
+              </a:rPr>
+              <a:t>•  OLE — Formato binario compuesto de Office antiguo (.doc/.xls)</a:t>
+            </a:r>
+          </a:p>
+          <a:p>
+            <a:pPr>
+              <a:spcAft>
+                <a:spcPts val="600"/>
+              </a:spcAft>
+            </a:pPr>
+            <a:r>
+              <a:rPr sz="1500">
+                <a:solidFill>
+                  <a:srgbClr val="22282E"/>
+                </a:solidFill>
+              </a:rPr>
+              <a:t>•  OOXML — Formato ZIP de Office moderno (.docx/.xlsx)</a:t>
+            </a:r>
+          </a:p>
+          <a:p>
+            <a:pPr>
+              <a:spcAft>
+                <a:spcPts val="600"/>
+              </a:spcAft>
+            </a:pPr>
+            <a:r>
+              <a:rPr sz="1500">
+                <a:solidFill>
+                  <a:srgbClr val="22282E"/>
+                </a:solidFill>
+              </a:rPr>
+              <a:t>•  Macro VBA — Código embebido en documentos Office</a:t>
+            </a:r>
+          </a:p>
+          <a:p>
+            <a:pPr>
+              <a:spcAft>
+                <a:spcPts val="600"/>
+              </a:spcAft>
+            </a:pPr>
+            <a:r>
+              <a:rPr sz="1500">
+                <a:solidFill>
+                  <a:srgbClr val="22282E"/>
+                </a:solidFill>
+              </a:rPr>
+              <a:t>•  AutoOpen / DocumentOpen — Macros que se ejecutan al abrir el documento</a:t>
             </a:r>
           </a:p>
         </p:txBody>
@@ -4494,7 +4885,7 @@
                   <a:srgbClr val="0B3D2E"/>
                 </a:solidFill>
               </a:rPr>
-              <a:t>✍️ Ejercicios</a:t>
+              <a:t>🧰 Herramientas y preparación</a:t>
             </a:r>
           </a:p>
         </p:txBody>
@@ -4532,82 +4923,52 @@
                   <a:srgbClr val="22282E"/>
                 </a:solidFill>
               </a:rPr>
-              <a:t>•  Explica la diferencia de análisis entre .doc (OLE) y .docx/.xlsm (OOXML).</a:t>
-            </a:r>
-          </a:p>
-          <a:p>
-            <a:pPr>
-              <a:spcAft>
-                <a:spcPts val="600"/>
-              </a:spcAft>
-            </a:pPr>
-            <a:r>
-              <a:rPr sz="1500">
-                <a:solidFill>
-                  <a:srgbClr val="22282E"/>
-                </a:solidFill>
-              </a:rPr>
-              <a:t>•  Desofusca una macro que usa Chr() + concatenación.</a:t>
-            </a:r>
-          </a:p>
-          <a:p>
-            <a:pPr>
-              <a:spcAft>
-                <a:spcPts val="600"/>
-              </a:spcAft>
-            </a:pPr>
-            <a:r>
-              <a:rPr sz="1500">
-                <a:solidFill>
-                  <a:srgbClr val="22282E"/>
-                </a:solidFill>
-              </a:rPr>
-              <a:t>•  Decodifica un powershell -enc y extrae la URL.</a:t>
-            </a:r>
-          </a:p>
-          <a:p>
-            <a:pPr>
-              <a:spcAft>
-                <a:spcPts val="600"/>
-              </a:spcAft>
-            </a:pPr>
-            <a:r>
-              <a:rPr sz="1500">
-                <a:solidFill>
-                  <a:srgbClr val="22282E"/>
-                </a:solidFill>
-              </a:rPr>
-              <a:t>•  Interpreta la salida de pdfid.py y prioriza qué objeto revisar.</a:t>
-            </a:r>
-          </a:p>
-          <a:p>
-            <a:pPr>
-              <a:spcAft>
-                <a:spcPts val="600"/>
-              </a:spcAft>
-            </a:pPr>
-            <a:r>
-              <a:rPr sz="1500">
-                <a:solidFill>
-                  <a:srgbClr val="22282E"/>
-                </a:solidFill>
-              </a:rPr>
-              <a:t>•  Extrae y explica un /OpenAction con /Launch.</a:t>
-            </a:r>
-          </a:p>
-          <a:p>
-            <a:pPr>
-              <a:spcAft>
-                <a:spcPts val="600"/>
-              </a:spcAft>
-            </a:pPr>
-            <a:r>
-              <a:rPr sz="1500">
-                <a:solidFill>
-                  <a:srgbClr val="22282E"/>
-                </a:solidFill>
-              </a:rPr>
-              <a:t>•  Redacta 5 IOCs a partir de un documento analizado.</a:t>
+              <a:t>•  oletools (olevba, oleid, oledump.py) para Office.</a:t>
+            </a:r>
+          </a:p>
+          <a:p>
+            <a:pPr>
+              <a:spcAft>
+                <a:spcPts val="600"/>
+              </a:spcAft>
+            </a:pPr>
+            <a:r>
+              <a:rPr sz="1500">
+                <a:solidFill>
+                  <a:srgbClr val="22282E"/>
+                </a:solidFill>
+              </a:rPr>
+              <a:t>•  peepdf, pdf-parser.py, pdfid.py (Didier Stevens) para PDF.</a:t>
+            </a:r>
+          </a:p>
+          <a:p>
+            <a:pPr>
+              <a:spcAft>
+                <a:spcPts val="600"/>
+              </a:spcAft>
+            </a:pPr>
+            <a:r>
+              <a:rPr sz="1500">
+                <a:solidFill>
+                  <a:srgbClr val="22282E"/>
+                </a:solidFill>
+              </a:rPr>
+              <a:t>•  CyberChef para desofuscar cadenas.</a:t>
+            </a:r>
+          </a:p>
+          <a:p>
+            <a:pPr>
+              <a:spcAft>
+                <a:spcPts val="600"/>
+              </a:spcAft>
+            </a:pPr>
+            <a:r>
+              <a:rPr sz="1500">
+                <a:solidFill>
+                  <a:srgbClr val="22282E"/>
+                </a:solidFill>
+              </a:rPr>
+              <a:t>•  REMnux trae la mayoría preinstaladas.</a:t>
             </a:r>
           </a:p>
         </p:txBody>
@@ -4658,7 +5019,7 @@
                   <a:srgbClr val="0B3D2E"/>
                 </a:solidFill>
               </a:rPr>
-              <a:t>📝 Reto verificable</a:t>
+              <a:t>🧪 Laboratorio guiado</a:t>
             </a:r>
           </a:p>
         </p:txBody>
@@ -4696,22 +5057,97 @@
                   <a:srgbClr val="22282E"/>
                 </a:solidFill>
               </a:rPr>
-              <a:t>•  Analiza un documento malicioso (Office o PDF) y entrega la cadena de ejecución reconstruida desde la apertura hasta el payload de segunda etapa, con la macro/JS desofuscado y los IOCs.</a:t>
-            </a:r>
-          </a:p>
-          <a:p>
-            <a:pPr>
-              <a:spcAft>
-                <a:spcPts val="600"/>
-              </a:spcAft>
-            </a:pPr>
-            <a:r>
-              <a:rPr sz="1500">
-                <a:solidFill>
-                  <a:srgbClr val="22282E"/>
-                </a:solidFill>
-              </a:rPr>
-              <a:t>•  Criterio de aceptación: presentas el comando final desofuscado (p. ej. el PowerShell decodificado) y al menos una URL/IOC de la segunda etapa, sin haber abierto nunca el documento en su aplicación.</a:t>
+              <a:t>•  Documento Office con macros:</a:t>
+            </a:r>
+          </a:p>
+          <a:p>
+            <a:pPr>
+              <a:spcAft>
+                <a:spcPts val="600"/>
+              </a:spcAft>
+            </a:pPr>
+            <a:r>
+              <a:rPr sz="1500">
+                <a:solidFill>
+                  <a:srgbClr val="22282E"/>
+                </a:solidFill>
+              </a:rPr>
+              <a:t>•  Identifica el tipo: oleid documento.doc. ¿Tiene macros?, ¿VBA?, ¿objetos embebidos?</a:t>
+            </a:r>
+          </a:p>
+          <a:p>
+            <a:pPr>
+              <a:spcAft>
+                <a:spcPts val="600"/>
+              </a:spcAft>
+            </a:pPr>
+            <a:r>
+              <a:rPr sz="1500">
+                <a:solidFill>
+                  <a:srgbClr val="22282E"/>
+                </a:solidFill>
+              </a:rPr>
+              <a:t>•  Extrae y analiza la macro: olevba documento.doc. Localiza AutoOpen/DocumentOpen y marca las cadenas ofuscadas.</a:t>
+            </a:r>
+          </a:p>
+          <a:p>
+            <a:pPr>
+              <a:spcAft>
+                <a:spcPts val="600"/>
+              </a:spcAft>
+            </a:pPr>
+            <a:r>
+              <a:rPr sz="1500">
+                <a:solidFill>
+                  <a:srgbClr val="22282E"/>
+                </a:solidFill>
+              </a:rPr>
+              <a:t>•  Desofusca: reconstruye concatenaciones, Chr(), base64 y XOR con CyberChef hasta obtener el comando real (típicamente un powershell -enc ...).</a:t>
+            </a:r>
+          </a:p>
+          <a:p>
+            <a:pPr>
+              <a:spcAft>
+                <a:spcPts val="600"/>
+              </a:spcAft>
+            </a:pPr>
+            <a:r>
+              <a:rPr sz="1500">
+                <a:solidFill>
+                  <a:srgbClr val="22282E"/>
+                </a:solidFill>
+              </a:rPr>
+              <a:t>•  Decodifica el PowerShell (-EncodedCommand es base64 UTF-16LE) y extrae la URL de descarga y el payload de segunda etapa.</a:t>
+            </a:r>
+          </a:p>
+          <a:p>
+            <a:pPr>
+              <a:spcAft>
+                <a:spcPts val="600"/>
+              </a:spcAft>
+            </a:pPr>
+            <a:r>
+              <a:rPr sz="1500">
+                <a:solidFill>
+                  <a:srgbClr val="22282E"/>
+                </a:solidFill>
+              </a:rPr>
+              <a:t>•  PDF malicioso:</a:t>
+            </a:r>
+          </a:p>
+          <a:p>
+            <a:pPr>
+              <a:spcAft>
+                <a:spcPts val="600"/>
+              </a:spcAft>
+            </a:pPr>
+            <a:r>
+              <a:rPr sz="1500">
+                <a:solidFill>
+                  <a:srgbClr val="22282E"/>
+                </a:solidFill>
+              </a:rPr>
+              <a:t>•  Triaje: pdfid.py doc.pdf para contar /JS, /OpenAction, /Launch, /EmbeddedFile.</a:t>
             </a:r>
           </a:p>
         </p:txBody>
